--- a/instructor/slides/pptx/lectures/L24.pptx
+++ b/instructor/slides/pptx/lectures/L24.pptx
@@ -3807,8 +3807,8 @@
         </p:nvSpPr>
         <p:spPr>
           <a:xfrm>
-            <a:off x="640080" y="1920240"/>
-            <a:ext cx="10972800" cy="1463040"/>
+            <a:off x="640080" y="1828800"/>
+            <a:ext cx="6675120" cy="1645920"/>
           </a:xfrm>
           <a:prstGeom prst="rect">
             <a:avLst/>
@@ -3822,7 +3822,7 @@
           <a:lstStyle/>
           <a:p>
             <a:r>
-              <a:rPr sz="4400" b="1">
+              <a:rPr sz="4000" b="1">
                 <a:solidFill>
                   <a:srgbClr val="FFFFFF"/>
                 </a:solidFill>
@@ -3841,8 +3841,8 @@
         </p:nvSpPr>
         <p:spPr>
           <a:xfrm>
-            <a:off x="640080" y="3657600"/>
-            <a:ext cx="10789920" cy="1097280"/>
+            <a:off x="640080" y="3794760"/>
+            <a:ext cx="6675120" cy="1097280"/>
           </a:xfrm>
           <a:prstGeom prst="rect">
             <a:avLst/>
@@ -3856,7 +3856,7 @@
           <a:lstStyle/>
           <a:p>
             <a:r>
-              <a:rPr sz="2000" b="0">
+              <a:rPr sz="1800" b="0">
                 <a:solidFill>
                   <a:srgbClr val="B7CBDE"/>
                 </a:solidFill>
@@ -3875,8 +3875,8 @@
         </p:nvSpPr>
         <p:spPr>
           <a:xfrm>
-            <a:off x="640080" y="5029200"/>
-            <a:ext cx="10972800" cy="457200"/>
+            <a:off x="640080" y="5120640"/>
+            <a:ext cx="6766560" cy="457200"/>
           </a:xfrm>
           <a:prstGeom prst="rect">
             <a:avLst/>
@@ -3890,7 +3890,7 @@
           <a:lstStyle/>
           <a:p>
             <a:r>
-              <a:rPr sz="1600" b="0">
+              <a:rPr sz="1500" b="0">
                 <a:solidFill>
                   <a:srgbClr val="3EC6FF"/>
                 </a:solidFill>
@@ -3901,6 +3901,30 @@
           </a:p>
         </p:txBody>
       </p:sp>
+      <p:pic>
+        <p:nvPicPr>
+          <p:cNvPr id="7" name="Picture 6" descr="dw-formats.jpg"/>
+          <p:cNvPicPr>
+            <a:picLocks noChangeAspect="1"/>
+          </p:cNvPicPr>
+          <p:nvPr/>
+        </p:nvPicPr>
+        <p:blipFill>
+          <a:blip r:embed="rId2"/>
+          <a:stretch>
+            <a:fillRect/>
+          </a:stretch>
+        </p:blipFill>
+        <p:spPr>
+          <a:xfrm>
+            <a:off x="7452360" y="1325880"/>
+            <a:ext cx="4160520" cy="4160520"/>
+          </a:xfrm>
+          <a:prstGeom prst="rect">
+            <a:avLst/>
+          </a:prstGeom>
+        </p:spPr>
+      </p:pic>
     </p:spTree>
   </p:cSld>
   <p:clrMapOvr>
@@ -4004,8 +4028,8 @@
         </p:nvSpPr>
         <p:spPr>
           <a:xfrm>
-            <a:off x="640080" y="685800"/>
-            <a:ext cx="10972800" cy="1463040"/>
+            <a:off x="640080" y="658368"/>
+            <a:ext cx="7863840" cy="1645920"/>
           </a:xfrm>
           <a:prstGeom prst="rect">
             <a:avLst/>
@@ -4019,7 +4043,7 @@
           <a:lstStyle/>
           <a:p>
             <a:r>
-              <a:rPr sz="3200" b="1">
+              <a:rPr sz="3000" b="1">
                 <a:solidFill>
                   <a:srgbClr val="FFFFFF"/>
                 </a:solidFill>
@@ -4038,8 +4062,8 @@
         </p:nvSpPr>
         <p:spPr>
           <a:xfrm>
-            <a:off x="777240" y="2286000"/>
-            <a:ext cx="10607040" cy="4754880"/>
+            <a:off x="777240" y="2331720"/>
+            <a:ext cx="7498079" cy="4754880"/>
           </a:xfrm>
           <a:prstGeom prst="rect">
             <a:avLst/>
@@ -4058,7 +4082,7 @@
               </a:spcAft>
             </a:pPr>
             <a:r>
-              <a:rPr sz="2400" b="0">
+              <a:rPr sz="2200" b="0">
                 <a:solidFill>
                   <a:srgbClr val="FFFFFF"/>
                 </a:solidFill>
@@ -4069,6 +4093,30 @@
           </a:p>
         </p:txBody>
       </p:sp>
+      <p:pic>
+        <p:nvPicPr>
+          <p:cNvPr id="6" name="Picture 5" descr="dw-formats.jpg"/>
+          <p:cNvPicPr>
+            <a:picLocks noChangeAspect="1"/>
+          </p:cNvPicPr>
+          <p:nvPr/>
+        </p:nvPicPr>
+        <p:blipFill>
+          <a:blip r:embed="rId2"/>
+          <a:stretch>
+            <a:fillRect/>
+          </a:stretch>
+        </p:blipFill>
+        <p:spPr>
+          <a:xfrm>
+            <a:off x="8732520" y="2057400"/>
+            <a:ext cx="2880360" cy="2880360"/>
+          </a:xfrm>
+          <a:prstGeom prst="rect">
+            <a:avLst/>
+          </a:prstGeom>
+        </p:spPr>
+      </p:pic>
     </p:spTree>
   </p:cSld>
   <p:clrMapOvr>
@@ -4172,8 +4220,8 @@
         </p:nvSpPr>
         <p:spPr>
           <a:xfrm>
-            <a:off x="640080" y="685800"/>
-            <a:ext cx="10972800" cy="1463040"/>
+            <a:off x="640080" y="658368"/>
+            <a:ext cx="7863840" cy="1645920"/>
           </a:xfrm>
           <a:prstGeom prst="rect">
             <a:avLst/>
@@ -4187,7 +4235,7 @@
           <a:lstStyle/>
           <a:p>
             <a:r>
-              <a:rPr sz="3200" b="1">
+              <a:rPr sz="3000" b="1">
                 <a:solidFill>
                   <a:srgbClr val="FFFFFF"/>
                 </a:solidFill>
@@ -4206,8 +4254,8 @@
         </p:nvSpPr>
         <p:spPr>
           <a:xfrm>
-            <a:off x="777240" y="2286000"/>
-            <a:ext cx="10607040" cy="4754880"/>
+            <a:off x="777240" y="2331720"/>
+            <a:ext cx="7498079" cy="4754880"/>
           </a:xfrm>
           <a:prstGeom prst="rect">
             <a:avLst/>
@@ -4226,7 +4274,7 @@
               </a:spcAft>
             </a:pPr>
             <a:r>
-              <a:rPr sz="2400" b="0">
+              <a:rPr sz="2200" b="0">
                 <a:solidFill>
                   <a:srgbClr val="FFFFFF"/>
                 </a:solidFill>
@@ -4242,7 +4290,7 @@
               </a:spcAft>
             </a:pPr>
             <a:r>
-              <a:rPr sz="2400" b="0">
+              <a:rPr sz="2200" b="0">
                 <a:solidFill>
                   <a:srgbClr val="FFFFFF"/>
                 </a:solidFill>
@@ -4258,7 +4306,7 @@
               </a:spcAft>
             </a:pPr>
             <a:r>
-              <a:rPr sz="2400" b="0">
+              <a:rPr sz="2200" b="0">
                 <a:solidFill>
                   <a:srgbClr val="FFFFFF"/>
                 </a:solidFill>
@@ -4269,6 +4317,30 @@
           </a:p>
         </p:txBody>
       </p:sp>
+      <p:pic>
+        <p:nvPicPr>
+          <p:cNvPr id="6" name="Picture 5" descr="dw-formats.jpg"/>
+          <p:cNvPicPr>
+            <a:picLocks noChangeAspect="1"/>
+          </p:cNvPicPr>
+          <p:nvPr/>
+        </p:nvPicPr>
+        <p:blipFill>
+          <a:blip r:embed="rId2"/>
+          <a:stretch>
+            <a:fillRect/>
+          </a:stretch>
+        </p:blipFill>
+        <p:spPr>
+          <a:xfrm>
+            <a:off x="8732520" y="2057400"/>
+            <a:ext cx="2880360" cy="2880360"/>
+          </a:xfrm>
+          <a:prstGeom prst="rect">
+            <a:avLst/>
+          </a:prstGeom>
+        </p:spPr>
+      </p:pic>
     </p:spTree>
   </p:cSld>
   <p:clrMapOvr>
@@ -4372,8 +4444,8 @@
         </p:nvSpPr>
         <p:spPr>
           <a:xfrm>
-            <a:off x="640080" y="685800"/>
-            <a:ext cx="10972800" cy="1463040"/>
+            <a:off x="640080" y="658368"/>
+            <a:ext cx="10972800" cy="1645920"/>
           </a:xfrm>
           <a:prstGeom prst="rect">
             <a:avLst/>
@@ -4387,7 +4459,7 @@
           <a:lstStyle/>
           <a:p>
             <a:r>
-              <a:rPr sz="3200" b="1">
+              <a:rPr sz="3000" b="1">
                 <a:solidFill>
                   <a:srgbClr val="FFFFFF"/>
                 </a:solidFill>
@@ -4685,8 +4757,8 @@
         </p:nvSpPr>
         <p:spPr>
           <a:xfrm>
-            <a:off x="640080" y="685800"/>
-            <a:ext cx="10972800" cy="1463040"/>
+            <a:off x="640080" y="658368"/>
+            <a:ext cx="7863840" cy="1645920"/>
           </a:xfrm>
           <a:prstGeom prst="rect">
             <a:avLst/>
@@ -4700,7 +4772,7 @@
           <a:lstStyle/>
           <a:p>
             <a:r>
-              <a:rPr sz="3200" b="1">
+              <a:rPr sz="3000" b="1">
                 <a:solidFill>
                   <a:srgbClr val="FFFFFF"/>
                 </a:solidFill>
@@ -4719,8 +4791,8 @@
         </p:nvSpPr>
         <p:spPr>
           <a:xfrm>
-            <a:off x="777240" y="2286000"/>
-            <a:ext cx="10607040" cy="4754880"/>
+            <a:off x="777240" y="2331720"/>
+            <a:ext cx="7498079" cy="4754880"/>
           </a:xfrm>
           <a:prstGeom prst="rect">
             <a:avLst/>
@@ -4739,7 +4811,7 @@
               </a:spcAft>
             </a:pPr>
             <a:r>
-              <a:rPr sz="2400" b="0">
+              <a:rPr sz="2200" b="0">
                 <a:solidFill>
                   <a:srgbClr val="FFFFFF"/>
                 </a:solidFill>
@@ -4750,6 +4822,30 @@
           </a:p>
         </p:txBody>
       </p:sp>
+      <p:pic>
+        <p:nvPicPr>
+          <p:cNvPr id="6" name="Picture 5" descr="dw-formats.jpg"/>
+          <p:cNvPicPr>
+            <a:picLocks noChangeAspect="1"/>
+          </p:cNvPicPr>
+          <p:nvPr/>
+        </p:nvPicPr>
+        <p:blipFill>
+          <a:blip r:embed="rId2"/>
+          <a:stretch>
+            <a:fillRect/>
+          </a:stretch>
+        </p:blipFill>
+        <p:spPr>
+          <a:xfrm>
+            <a:off x="8732520" y="2057400"/>
+            <a:ext cx="2880360" cy="2880360"/>
+          </a:xfrm>
+          <a:prstGeom prst="rect">
+            <a:avLst/>
+          </a:prstGeom>
+        </p:spPr>
+      </p:pic>
     </p:spTree>
   </p:cSld>
   <p:clrMapOvr>
